--- a/Lecture slides/AMOS B04 - Agile Planning.pptx
+++ b/Lecture slides/AMOS B04 - Agile Planning.pptx
@@ -15052,7 +15052,7 @@
             <a:tbl>
               <a:tblPr>
                 <a:noFill/>
-                <a:tableStyleId>{06765188-D505-4E99-84A0-020E74BA5E39}</a:tableStyleId>
+                <a:tableStyleId>{96506DBD-3D3E-4A17-BA4F-6DBCD4D43477}</a:tableStyleId>
               </a:tblPr>
               <a:tblGrid>
                 <a:gridCol w="2466575"/>
@@ -18871,7 +18871,7 @@
             <a:tbl>
               <a:tblPr>
                 <a:noFill/>
-                <a:tableStyleId>{06765188-D505-4E99-84A0-020E74BA5E39}</a:tableStyleId>
+                <a:tableStyleId>{96506DBD-3D3E-4A17-BA4F-6DBCD4D43477}</a:tableStyleId>
               </a:tblPr>
               <a:tblGrid>
                 <a:gridCol w="647000"/>
@@ -20295,7 +20295,7 @@
             <a:tbl>
               <a:tblPr>
                 <a:noFill/>
-                <a:tableStyleId>{06765188-D505-4E99-84A0-020E74BA5E39}</a:tableStyleId>
+                <a:tableStyleId>{96506DBD-3D3E-4A17-BA4F-6DBCD4D43477}</a:tableStyleId>
               </a:tblPr>
               <a:tblGrid>
                 <a:gridCol w="2103125"/>
@@ -21904,7 +21904,7 @@
             <a:tbl>
               <a:tblPr>
                 <a:noFill/>
-                <a:tableStyleId>{06765188-D505-4E99-84A0-020E74BA5E39}</a:tableStyleId>
+                <a:tableStyleId>{96506DBD-3D3E-4A17-BA4F-6DBCD4D43477}</a:tableStyleId>
               </a:tblPr>
               <a:tblGrid>
                 <a:gridCol w="637250"/>
@@ -26233,7 +26233,7 @@
             <a:tbl>
               <a:tblPr>
                 <a:noFill/>
-                <a:tableStyleId>{C864D910-C642-4BC7-AC68-6AAAE45BA753}</a:tableStyleId>
+                <a:tableStyleId>{539AB8FE-DE9D-4782-B8AC-FF0430CCA83A}</a:tableStyleId>
               </a:tblPr>
               <a:tblGrid>
                 <a:gridCol w="645525"/>
@@ -39801,7 +39801,7 @@
             <a:tbl>
               <a:tblPr>
                 <a:noFill/>
-                <a:tableStyleId>{06765188-D505-4E99-84A0-020E74BA5E39}</a:tableStyleId>
+                <a:tableStyleId>{96506DBD-3D3E-4A17-BA4F-6DBCD4D43477}</a:tableStyleId>
               </a:tblPr>
               <a:tblGrid>
                 <a:gridCol w="1719075"/>
@@ -42995,7 +42995,7 @@
 </file>
 
 <file path=ppt/theme/theme1.xml><?xml version="1.0" encoding="utf-8"?>
-<a:theme xmlns:a="http://schemas.openxmlformats.org/drawingml/2006/main" xmlns:r="http://schemas.openxmlformats.org/officeDocument/2006/relationships" name="AMOS Slides Template">
+<a:theme xmlns:a="http://schemas.openxmlformats.org/drawingml/2006/main" xmlns:r="http://schemas.openxmlformats.org/officeDocument/2006/relationships" name="POSS Slides Template">
   <a:themeElements>
     <a:clrScheme name="Simple Light">
       <a:dk1>
@@ -43274,7 +43274,7 @@
 </file>
 
 <file path=ppt/theme/theme2.xml><?xml version="1.0" encoding="utf-8"?>
-<a:theme xmlns:a="http://schemas.openxmlformats.org/drawingml/2006/main" xmlns:r="http://schemas.openxmlformats.org/officeDocument/2006/relationships" name="POSS Slides Template">
+<a:theme xmlns:a="http://schemas.openxmlformats.org/drawingml/2006/main" xmlns:r="http://schemas.openxmlformats.org/officeDocument/2006/relationships" name="AMOS Slides Template">
   <a:themeElements>
     <a:clrScheme name="Simple Light">
       <a:dk1>
